--- a/9.Deep_learning/class/in1class/1ann/class_3_module_9_deep learning_Loss_Functions Gradient Descent.pptx
+++ b/9.Deep_learning/class/in1class/1ann/class_3_module_9_deep learning_Loss_Functions Gradient Descent.pptx
@@ -16846,8 +16846,8 @@
         </p:nvSpPr>
         <p:spPr>
           <a:xfrm>
-            <a:off x="3048000" y="2444750"/>
-            <a:ext cx="6096000" cy="1968500"/>
+            <a:off x="191770" y="1651635"/>
+            <a:ext cx="8413115" cy="1722120"/>
           </a:xfrm>
           <a:prstGeom prst="rect">
             <a:avLst/>
@@ -16867,6 +16867,17 @@
                 <a:spcPts val="400"/>
               </a:spcAft>
             </a:pPr>
+            <a:r>
+              <a:rPr lang="en-US" sz="1600">
+                <a:solidFill>
+                  <a:srgbClr val="001D35"/>
+                </a:solidFill>
+                <a:latin typeface="Google Sans"/>
+                <a:ea typeface="Google Sans"/>
+                <a:sym typeface="+mn-ea"/>
+              </a:rPr>
+              <a:t>P</a:t>
+            </a:r>
             <a:r>
               <a:rPr sz="1600">
                 <a:solidFill>
@@ -23462,198 +23473,6 @@
           </a:p>
         </p:txBody>
       </p:sp>
-      <p:graphicFrame>
-        <p:nvGraphicFramePr>
-          <p:cNvPr id="5" name="Table 4"/>
-          <p:cNvGraphicFramePr/>
-          <p:nvPr/>
-        </p:nvGraphicFramePr>
-        <p:xfrm>
-          <a:off x="531495" y="5276215"/>
-          <a:ext cx="10485120" cy="1645920"/>
-        </p:xfrm>
-        <a:graphic>
-          <a:graphicData uri="http://schemas.openxmlformats.org/drawingml/2006/table">
-            <a:tbl>
-              <a:tblPr>
-                <a:tableStyleId>{3C2FFA5D-87B4-456A-9821-1D502468CF0F}</a:tableStyleId>
-              </a:tblPr>
-              <a:tblGrid>
-                <a:gridCol w="5242560"/>
-                <a:gridCol w="5242560"/>
-              </a:tblGrid>
-              <a:tr h="0">
-                <a:tc>
-                  <a:txBody>
-                    <a:bodyPr/>
-                    <a:p>
-                      <a:r>
-                        <a:rPr sz="1800"/>
-                        <a:t>Scenario</a:t>
-                      </a:r>
-                      <a:endParaRPr sz="1800"/>
-                    </a:p>
-                  </a:txBody>
-                  <a:tcPr marL="0" marR="0" marT="0" marB="0" anchor="ctr" anchorCtr="0"/>
-                </a:tc>
-                <a:tc>
-                  <a:txBody>
-                    <a:bodyPr/>
-                    <a:p>
-                      <a:r>
-                        <a:rPr sz="1800"/>
-                        <a:t>Best Optimizer</a:t>
-                      </a:r>
-                      <a:endParaRPr sz="1800"/>
-                    </a:p>
-                  </a:txBody>
-                  <a:tcPr marL="0" marR="0" marT="0" marB="0" anchor="ctr" anchorCtr="0"/>
-                </a:tc>
-              </a:tr>
-              <a:tr h="0">
-                <a:tc>
-                  <a:txBody>
-                    <a:bodyPr/>
-                    <a:p>
-                      <a:r>
-                        <a:rPr sz="1800"/>
-                        <a:t>General deep learning</a:t>
-                      </a:r>
-                      <a:endParaRPr sz="1800"/>
-                    </a:p>
-                  </a:txBody>
-                  <a:tcPr marL="0" marR="0" marT="0" marB="0" anchor="ctr" anchorCtr="0"/>
-                </a:tc>
-                <a:tc>
-                  <a:txBody>
-                    <a:bodyPr/>
-                    <a:p>
-                      <a:r>
-                        <a:rPr sz="1800"/>
-                        <a:t>Adam (fast, adaptive)</a:t>
-                      </a:r>
-                      <a:endParaRPr sz="1800"/>
-                    </a:p>
-                  </a:txBody>
-                  <a:tcPr marL="0" marR="0" marT="0" marB="0" anchor="ctr" anchorCtr="0"/>
-                </a:tc>
-              </a:tr>
-              <a:tr h="153035">
-                <a:tc>
-                  <a:txBody>
-                    <a:bodyPr/>
-                    <a:p>
-                      <a:r>
-                        <a:rPr sz="1800"/>
-                        <a:t>Large-scale NLP (Transformers)</a:t>
-                      </a:r>
-                      <a:endParaRPr sz="1800"/>
-                    </a:p>
-                  </a:txBody>
-                  <a:tcPr marL="0" marR="0" marT="0" marB="0" anchor="ctr" anchorCtr="0"/>
-                </a:tc>
-                <a:tc>
-                  <a:txBody>
-                    <a:bodyPr/>
-                    <a:p>
-                      <a:r>
-                        <a:rPr sz="1800"/>
-                        <a:t>AdamW (prevents overfitting)</a:t>
-                      </a:r>
-                      <a:endParaRPr sz="1800"/>
-                    </a:p>
-                  </a:txBody>
-                  <a:tcPr marL="0" marR="0" marT="0" marB="0" anchor="ctr" anchorCtr="0"/>
-                </a:tc>
-              </a:tr>
-              <a:tr h="0">
-                <a:tc>
-                  <a:txBody>
-                    <a:bodyPr/>
-                    <a:p>
-                      <a:r>
-                        <a:rPr sz="1800"/>
-                        <a:t>Simple problems (Regression, MLPs)</a:t>
-                      </a:r>
-                      <a:endParaRPr sz="1800"/>
-                    </a:p>
-                  </a:txBody>
-                  <a:tcPr marL="0" marR="0" marT="0" marB="0" anchor="ctr" anchorCtr="0"/>
-                </a:tc>
-                <a:tc>
-                  <a:txBody>
-                    <a:bodyPr/>
-                    <a:p>
-                      <a:r>
-                        <a:rPr sz="1800"/>
-                        <a:t>SGD</a:t>
-                      </a:r>
-                      <a:endParaRPr sz="1800"/>
-                    </a:p>
-                  </a:txBody>
-                  <a:tcPr marL="0" marR="0" marT="0" marB="0" anchor="ctr" anchorCtr="0"/>
-                </a:tc>
-              </a:tr>
-              <a:tr h="0">
-                <a:tc>
-                  <a:txBody>
-                    <a:bodyPr/>
-                    <a:p>
-                      <a:r>
-                        <a:rPr sz="1800"/>
-                        <a:t>Image classification (CNNs)</a:t>
-                      </a:r>
-                      <a:endParaRPr sz="1800"/>
-                    </a:p>
-                  </a:txBody>
-                  <a:tcPr marL="0" marR="0" marT="0" marB="0" anchor="ctr" anchorCtr="0"/>
-                </a:tc>
-                <a:tc>
-                  <a:txBody>
-                    <a:bodyPr/>
-                    <a:p>
-                      <a:r>
-                        <a:rPr sz="1800"/>
-                        <a:t>SGD + Momentum / Adam</a:t>
-                      </a:r>
-                      <a:endParaRPr sz="1800"/>
-                    </a:p>
-                  </a:txBody>
-                  <a:tcPr marL="0" marR="0" marT="0" marB="0" anchor="ctr" anchorCtr="0"/>
-                </a:tc>
-              </a:tr>
-              <a:tr h="0">
-                <a:tc>
-                  <a:txBody>
-                    <a:bodyPr/>
-                    <a:p>
-                      <a:r>
-                        <a:rPr sz="1800"/>
-                        <a:t>Recurrent Neural Networks (RNNs, LSTMs)</a:t>
-                      </a:r>
-                      <a:endParaRPr sz="1800"/>
-                    </a:p>
-                  </a:txBody>
-                  <a:tcPr marL="0" marR="0" marT="0" marB="0" anchor="ctr" anchorCtr="0"/>
-                </a:tc>
-                <a:tc>
-                  <a:txBody>
-                    <a:bodyPr/>
-                    <a:p>
-                      <a:r>
-                        <a:rPr sz="1800"/>
-                        <a:t>RMSprop / Adam</a:t>
-                      </a:r>
-                      <a:endParaRPr sz="1800"/>
-                    </a:p>
-                  </a:txBody>
-                  <a:tcPr marL="0" marR="0" marT="0" marB="0" anchor="ctr" anchorCtr="0"/>
-                </a:tc>
-              </a:tr>
-            </a:tbl>
-          </a:graphicData>
-        </a:graphic>
-      </p:graphicFrame>
       <p:pic>
         <p:nvPicPr>
           <p:cNvPr id="4" name="Picture 3" descr="Screenshot (350)"/>
@@ -23679,44 +23498,6 @@
           </a:prstGeom>
         </p:spPr>
       </p:pic>
-      <p:sp>
-        <p:nvSpPr>
-          <p:cNvPr id="6" name="Text Box 5"/>
-          <p:cNvSpPr txBox="1"/>
-          <p:nvPr/>
-        </p:nvSpPr>
-        <p:spPr>
-          <a:xfrm>
-            <a:off x="531495" y="4771390"/>
-            <a:ext cx="6096000" cy="429895"/>
-          </a:xfrm>
-          <a:prstGeom prst="rect">
-            <a:avLst/>
-          </a:prstGeom>
-          <a:noFill/>
-        </p:spPr>
-        <p:txBody>
-          <a:bodyPr wrap="square" rtlCol="0" anchor="t">
-            <a:spAutoFit/>
-          </a:bodyPr>
-          <a:p>
-            <a:pPr>
-              <a:spcAft>
-                <a:spcPct val="60000"/>
-              </a:spcAft>
-            </a:pPr>
-            <a:r>
-              <a:rPr sz="2200" b="1">
-                <a:sym typeface="+mn-ea"/>
-              </a:rPr>
-              <a:t>4. Which Optimizer Should You Use?</a:t>
-            </a:r>
-            <a:endParaRPr lang="en-US" sz="2200" b="1">
-              <a:sym typeface="+mn-ea"/>
-            </a:endParaRPr>
-          </a:p>
-        </p:txBody>
-      </p:sp>
     </p:spTree>
   </p:cSld>
   <p:clrMapOvr>
@@ -24586,6 +24367,236 @@
         <p:nvPr/>
       </p:nvGrpSpPr>
       <p:grpSpPr/>
+      <p:graphicFrame>
+        <p:nvGraphicFramePr>
+          <p:cNvPr id="5" name="Table 4"/>
+          <p:cNvGraphicFramePr/>
+          <p:nvPr/>
+        </p:nvGraphicFramePr>
+        <p:xfrm>
+          <a:off x="531495" y="722630"/>
+          <a:ext cx="10485120" cy="2468880"/>
+        </p:xfrm>
+        <a:graphic>
+          <a:graphicData uri="http://schemas.openxmlformats.org/drawingml/2006/table">
+            <a:tbl>
+              <a:tblPr>
+                <a:tableStyleId>{3C2FFA5D-87B4-456A-9821-1D502468CF0F}</a:tableStyleId>
+              </a:tblPr>
+              <a:tblGrid>
+                <a:gridCol w="5242560"/>
+                <a:gridCol w="5242560"/>
+              </a:tblGrid>
+              <a:tr h="411480">
+                <a:tc>
+                  <a:txBody>
+                    <a:bodyPr/>
+                    <a:p>
+                      <a:r>
+                        <a:rPr sz="1800"/>
+                        <a:t>Scenario</a:t>
+                      </a:r>
+                      <a:endParaRPr sz="1800"/>
+                    </a:p>
+                  </a:txBody>
+                  <a:tcPr marL="0" marR="0" marT="0" marB="0" anchor="ctr" anchorCtr="0"/>
+                </a:tc>
+                <a:tc>
+                  <a:txBody>
+                    <a:bodyPr/>
+                    <a:p>
+                      <a:r>
+                        <a:rPr sz="1800"/>
+                        <a:t>Best Optimizer</a:t>
+                      </a:r>
+                      <a:endParaRPr sz="1800"/>
+                    </a:p>
+                  </a:txBody>
+                  <a:tcPr marL="0" marR="0" marT="0" marB="0" anchor="ctr" anchorCtr="0"/>
+                </a:tc>
+              </a:tr>
+              <a:tr h="411480">
+                <a:tc>
+                  <a:txBody>
+                    <a:bodyPr/>
+                    <a:p>
+                      <a:r>
+                        <a:rPr sz="1800"/>
+                        <a:t>General deep learning</a:t>
+                      </a:r>
+                      <a:endParaRPr sz="1800"/>
+                    </a:p>
+                  </a:txBody>
+                  <a:tcPr marL="0" marR="0" marT="0" marB="0" anchor="ctr" anchorCtr="0"/>
+                </a:tc>
+                <a:tc>
+                  <a:txBody>
+                    <a:bodyPr/>
+                    <a:p>
+                      <a:r>
+                        <a:rPr sz="1800"/>
+                        <a:t>Adam (fast, adaptive)</a:t>
+                      </a:r>
+                      <a:endParaRPr sz="1800"/>
+                    </a:p>
+                  </a:txBody>
+                  <a:tcPr marL="0" marR="0" marT="0" marB="0" anchor="ctr" anchorCtr="0"/>
+                </a:tc>
+              </a:tr>
+              <a:tr h="411480">
+                <a:tc>
+                  <a:txBody>
+                    <a:bodyPr/>
+                    <a:p>
+                      <a:r>
+                        <a:rPr sz="1800"/>
+                        <a:t>Large-scale NLP (Transformers)</a:t>
+                      </a:r>
+                      <a:endParaRPr sz="1800"/>
+                    </a:p>
+                  </a:txBody>
+                  <a:tcPr marL="0" marR="0" marT="0" marB="0" anchor="ctr" anchorCtr="0"/>
+                </a:tc>
+                <a:tc>
+                  <a:txBody>
+                    <a:bodyPr/>
+                    <a:p>
+                      <a:r>
+                        <a:rPr sz="1800"/>
+                        <a:t>AdamW (prevents overfitting)</a:t>
+                      </a:r>
+                      <a:endParaRPr sz="1800"/>
+                    </a:p>
+                  </a:txBody>
+                  <a:tcPr marL="0" marR="0" marT="0" marB="0" anchor="ctr" anchorCtr="0"/>
+                </a:tc>
+              </a:tr>
+              <a:tr h="411480">
+                <a:tc>
+                  <a:txBody>
+                    <a:bodyPr/>
+                    <a:p>
+                      <a:r>
+                        <a:rPr sz="1800"/>
+                        <a:t>Simple problems (Regression, MLPs)</a:t>
+                      </a:r>
+                      <a:endParaRPr sz="1800"/>
+                    </a:p>
+                  </a:txBody>
+                  <a:tcPr marL="0" marR="0" marT="0" marB="0" anchor="ctr" anchorCtr="0"/>
+                </a:tc>
+                <a:tc>
+                  <a:txBody>
+                    <a:bodyPr/>
+                    <a:p>
+                      <a:r>
+                        <a:rPr sz="1800"/>
+                        <a:t>SGD</a:t>
+                      </a:r>
+                      <a:endParaRPr sz="1800"/>
+                    </a:p>
+                  </a:txBody>
+                  <a:tcPr marL="0" marR="0" marT="0" marB="0" anchor="ctr" anchorCtr="0"/>
+                </a:tc>
+              </a:tr>
+              <a:tr h="411480">
+                <a:tc>
+                  <a:txBody>
+                    <a:bodyPr/>
+                    <a:p>
+                      <a:r>
+                        <a:rPr sz="1800"/>
+                        <a:t>Image classification (CNNs)</a:t>
+                      </a:r>
+                      <a:endParaRPr sz="1800"/>
+                    </a:p>
+                  </a:txBody>
+                  <a:tcPr marL="0" marR="0" marT="0" marB="0" anchor="ctr" anchorCtr="0"/>
+                </a:tc>
+                <a:tc>
+                  <a:txBody>
+                    <a:bodyPr/>
+                    <a:p>
+                      <a:r>
+                        <a:rPr sz="1800"/>
+                        <a:t>SGD + Momentum / Adam</a:t>
+                      </a:r>
+                      <a:endParaRPr sz="1800"/>
+                    </a:p>
+                  </a:txBody>
+                  <a:tcPr marL="0" marR="0" marT="0" marB="0" anchor="ctr" anchorCtr="0"/>
+                </a:tc>
+              </a:tr>
+              <a:tr h="411480">
+                <a:tc>
+                  <a:txBody>
+                    <a:bodyPr/>
+                    <a:p>
+                      <a:r>
+                        <a:rPr sz="1800"/>
+                        <a:t>Recurrent Neural Networks (RNNs, LSTMs)</a:t>
+                      </a:r>
+                      <a:endParaRPr sz="1800"/>
+                    </a:p>
+                  </a:txBody>
+                  <a:tcPr marL="0" marR="0" marT="0" marB="0" anchor="ctr" anchorCtr="0"/>
+                </a:tc>
+                <a:tc>
+                  <a:txBody>
+                    <a:bodyPr/>
+                    <a:p>
+                      <a:r>
+                        <a:rPr sz="1800"/>
+                        <a:t>RMSprop / Adam</a:t>
+                      </a:r>
+                      <a:endParaRPr sz="1800"/>
+                    </a:p>
+                  </a:txBody>
+                  <a:tcPr marL="0" marR="0" marT="0" marB="0" anchor="ctr" anchorCtr="0"/>
+                </a:tc>
+              </a:tr>
+            </a:tbl>
+          </a:graphicData>
+        </a:graphic>
+      </p:graphicFrame>
+      <p:sp>
+        <p:nvSpPr>
+          <p:cNvPr id="6" name="Text Box 5"/>
+          <p:cNvSpPr txBox="1"/>
+          <p:nvPr/>
+        </p:nvSpPr>
+        <p:spPr>
+          <a:xfrm>
+            <a:off x="531495" y="217805"/>
+            <a:ext cx="6096000" cy="643890"/>
+          </a:xfrm>
+          <a:prstGeom prst="rect">
+            <a:avLst/>
+          </a:prstGeom>
+          <a:noFill/>
+        </p:spPr>
+        <p:txBody>
+          <a:bodyPr wrap="square" rtlCol="0" anchor="t">
+            <a:noAutofit/>
+          </a:bodyPr>
+          <a:p>
+            <a:pPr>
+              <a:spcAft>
+                <a:spcPct val="60000"/>
+              </a:spcAft>
+            </a:pPr>
+            <a:r>
+              <a:rPr sz="2200" b="1">
+                <a:sym typeface="+mn-ea"/>
+              </a:rPr>
+              <a:t>4. Which Optimizer Should You Use?</a:t>
+            </a:r>
+            <a:endParaRPr lang="en-US" sz="2200" b="1">
+              <a:sym typeface="+mn-ea"/>
+            </a:endParaRPr>
+          </a:p>
+        </p:txBody>
+      </p:sp>
     </p:spTree>
   </p:cSld>
   <p:clrMapOvr>
